--- a/dist/초3/과학/물질과지구/초3_과학_물질과지구_02_지구의표면과바다_학생용.pptx
+++ b/dist/초3/과학/물질과지구/초3_과학_물질과지구_02_지구의표면과바다_학생용.pptx
@@ -122,13 +122,13 @@
   <p:extLst>
     <p:ext uri="{521415D9-36F7-43E2-AB2F-B90AF26B5E84}">
       <p14:sectionLst xmlns:p14="http://schemas.microsoft.com/office/powerpoint/2010/main">
-        <p14:section name="도입" id="{30f5458f-c87e-c221-2bcc-1e14844b83fe}">
+        <p14:section name="도입" id="{5cc63457-97a1-396c-1ba2-80573a696662}">
           <p14:sldIdLst>
             <p14:sldId id="256"/>
             <p14:sldId id="257"/>
           </p14:sldIdLst>
         </p14:section>
-        <p14:section name="개념" id="{cebbc51d-acbb-c180-88c9-69745927e73d}">
+        <p14:section name="개념" id="{001c1f13-3877-83ad-087a-a935f2a41d74}">
           <p14:sldIdLst>
             <p14:sldId id="258"/>
             <p14:sldId id="261"/>
@@ -136,7 +136,7 @@
             <p14:sldId id="266"/>
           </p14:sldIdLst>
         </p14:section>
-        <p14:section name="연습" id="{97fe132c-0efe-a591-24bd-840668669c00}">
+        <p14:section name="연습" id="{d691561b-9dd6-34d5-b31a-71dfaf32a04c}">
           <p14:sldIdLst>
             <p14:sldId id="259"/>
             <p14:sldId id="260"/>
@@ -146,30 +146,30 @@
             <p14:sldId id="267"/>
           </p14:sldIdLst>
         </p14:section>
-        <p14:section name="개념" id="{a9906e21-01ca-9334-bf3a-96cd13f51e75}">
+        <p14:section name="개념" id="{f7d9e144-c995-d69f-794c-8a3a4bd4d003}">
           <p14:sldIdLst/>
         </p14:section>
-        <p14:section name="연습" id="{7d9fa526-0c04-09ab-b85a-e758f883815e}">
+        <p14:section name="연습" id="{44efe799-a2bd-d18a-2b0e-125ab10bb0c4}">
           <p14:sldIdLst/>
         </p14:section>
-        <p14:section name="개념" id="{70214b92-1833-3be1-d790-0837007c0061}">
+        <p14:section name="개념" id="{88564d1b-3fe4-beb5-9566-0e985a14f71d}">
           <p14:sldIdLst/>
         </p14:section>
-        <p14:section name="연습" id="{f039183a-5f98-25b9-304e-1ea51b92fe89}">
+        <p14:section name="연습" id="{5d1d1b50-f29a-9f32-df02-65294e8038f0}">
           <p14:sldIdLst/>
         </p14:section>
-        <p14:section name="확인" id="{78235838-d807-6704-bd86-ac2d8006730f}">
+        <p14:section name="확인" id="{56c4aef8-b3d0-9c7b-90e2-f9541a51f2f9}">
           <p14:sldIdLst>
             <p14:sldId id="268"/>
             <p14:sldId id="269"/>
           </p14:sldIdLst>
         </p14:section>
-        <p14:section name="정리" id="{868e89d1-5e44-aaf5-99f1-ea1d25a6b4ff}">
+        <p14:section name="정리" id="{550e3ef1-a97d-29c2-8a66-69a3a08b1856}">
           <p14:sldIdLst>
             <p14:sldId id="270"/>
           </p14:sldIdLst>
         </p14:section>
-        <p14:section name="보충" id="{7006d168-df60-eb9e-cd3d-a687ece97776}">
+        <p14:section name="보충" id="{e2ba20a0-8769-e880-5e79-688b4963f28c}">
           <p14:sldIdLst>
             <p14:sldId id="271"/>
           </p14:sldIdLst>
